--- a/Neuro-Symbolic-Grading-Slides.pptx
+++ b/Neuro-Symbolic-Grading-Slides.pptx
@@ -3545,7 +3545,7 @@
             </a:pPr>
             <a:r>
               <a:rPr/>
-              <a:t>Results — Fuzzy Combiner Wins on Agreement</a:t>
+              <a:t>Results — The Rule Base Adds the Gain</a:t>
             </a:r>
           </a:p>
         </p:txBody>
@@ -3715,7 +3715,7 @@
                       </a:pPr>
                       <a:r>
                         <a:rPr/>
-                        <a:t>similarity-only</a:t>
+                        <a:t>similarity-only (cross-enc.)</a:t>
                       </a:r>
                     </a:p>
                   </a:txBody>
@@ -3730,22 +3730,7 @@
                       </a:pPr>
                       <a:r>
                         <a:rPr/>
-                        <a:t>34.9</a:t>
-                      </a:r>
-                    </a:p>
-                  </a:txBody>
-                </a:tc>
-                <a:tc>
-                  <a:txBody>
-                    <a:bodyPr/>
-                    <a:lstStyle/>
-                    <a:p>
-                      <a:pPr lvl="0" indent="0" marL="0">
-                        <a:buNone/>
-                      </a:pPr>
-                      <a:r>
-                        <a:rPr b="1"/>
-                        <a:t>0.50</a:t>
+                        <a:t>36.3</a:t>
                       </a:r>
                     </a:p>
                   </a:txBody>
@@ -3760,7 +3745,22 @@
                       </a:pPr>
                       <a:r>
                         <a:rPr/>
-                        <a:t>0.26</a:t>
+                        <a:t>0.55</a:t>
+                      </a:r>
+                    </a:p>
+                  </a:txBody>
+                </a:tc>
+                <a:tc>
+                  <a:txBody>
+                    <a:bodyPr/>
+                    <a:lstStyle/>
+                    <a:p>
+                      <a:pPr lvl="0" indent="0" marL="0">
+                        <a:buNone/>
+                      </a:pPr>
+                      <a:r>
+                        <a:rPr/>
+                        <a:t>0.25</a:t>
                       </a:r>
                     </a:p>
                   </a:txBody>
@@ -3777,7 +3777,7 @@
                       </a:pPr>
                       <a:r>
                         <a:rPr/>
-                        <a:t>mean-of-modules</a:t>
+                        <a:t>linear mean (same 2 inputs)</a:t>
                       </a:r>
                     </a:p>
                   </a:txBody>
@@ -3792,7 +3792,7 @@
                       </a:pPr>
                       <a:r>
                         <a:rPr/>
-                        <a:t>33.1</a:t>
+                        <a:t>42.8</a:t>
                       </a:r>
                     </a:p>
                   </a:txBody>
@@ -3807,7 +3807,7 @@
                       </a:pPr>
                       <a:r>
                         <a:rPr/>
-                        <a:t>0.44</a:t>
+                        <a:t>0.54</a:t>
                       </a:r>
                     </a:p>
                   </a:txBody>
@@ -3822,7 +3822,7 @@
                       </a:pPr>
                       <a:r>
                         <a:rPr/>
-                        <a:t>0.25</a:t>
+                        <a:t>0.21</a:t>
                       </a:r>
                     </a:p>
                   </a:txBody>
@@ -3854,7 +3854,7 @@
                       </a:pPr>
                       <a:r>
                         <a:rPr/>
-                        <a:t>34.2</a:t>
+                        <a:t>35.3</a:t>
                       </a:r>
                     </a:p>
                   </a:txBody>
@@ -3869,7 +3869,7 @@
                       </a:pPr>
                       <a:r>
                         <a:rPr/>
-                        <a:t>0.48</a:t>
+                        <a:t>0.55</a:t>
                       </a:r>
                     </a:p>
                   </a:txBody>
@@ -3884,7 +3884,69 @@
                       </a:pPr>
                       <a:r>
                         <a:rPr b="1"/>
-                        <a:t>0.31</a:t>
+                        <a:t>0.32</a:t>
+                      </a:r>
+                    </a:p>
+                  </a:txBody>
+                </a:tc>
+              </a:tr>
+              <a:tr h="0">
+                <a:tc>
+                  <a:txBody>
+                    <a:bodyPr/>
+                    <a:lstStyle/>
+                    <a:p>
+                      <a:pPr lvl="0" indent="0" marL="0">
+                        <a:buNone/>
+                      </a:pPr>
+                      <a:r>
+                        <a:rPr b="1"/>
+                        <a:t>+ calibration (shipped)</a:t>
+                      </a:r>
+                    </a:p>
+                  </a:txBody>
+                </a:tc>
+                <a:tc>
+                  <a:txBody>
+                    <a:bodyPr/>
+                    <a:lstStyle/>
+                    <a:p>
+                      <a:pPr lvl="0" indent="0" marL="0">
+                        <a:buNone/>
+                      </a:pPr>
+                      <a:r>
+                        <a:rPr b="1"/>
+                        <a:t>17.7</a:t>
+                      </a:r>
+                    </a:p>
+                  </a:txBody>
+                </a:tc>
+                <a:tc>
+                  <a:txBody>
+                    <a:bodyPr/>
+                    <a:lstStyle/>
+                    <a:p>
+                      <a:pPr lvl="0" indent="0" marL="0">
+                        <a:buNone/>
+                      </a:pPr>
+                      <a:r>
+                        <a:rPr b="1"/>
+                        <a:t>0.59</a:t>
+                      </a:r>
+                    </a:p>
+                  </a:txBody>
+                </a:tc>
+                <a:tc>
+                  <a:txBody>
+                    <a:bodyPr/>
+                    <a:lstStyle/>
+                    <a:p>
+                      <a:pPr lvl="0" indent="0" marL="0">
+                        <a:buNone/>
+                      </a:pPr>
+                      <a:r>
+                        <a:rPr b="1"/>
+                        <a:t>0.46</a:t>
                       </a:r>
                     </a:p>
                   </a:txBody>
@@ -3933,23 +3995,27 @@
           <a:p>
             <a:pPr lvl="0"/>
             <a:r>
+              <a:rPr/>
+              <a:t>Fuzzy fusion </a:t>
+            </a:r>
+            <a:r>
               <a:rPr b="1"/>
-              <a:t>Best QWK of any configuration</a:t>
-            </a:r>
-            <a:r>
-              <a:rPr/>
-              <a:t> — beats every single module and the linear average.</a:t>
-            </a:r>
-          </a:p>
-          <a:p>
-            <a:pPr lvl="0"/>
-            <a:r>
-              <a:rPr/>
-              <a:t>After one affine calibration: held-out RMSE </a:t>
+              <a:t>beats a linear average of the SAME inputs</a:t>
+            </a:r>
+            <a:r>
+              <a:rPr/>
+              <a:t> (0.32 vs 0.21) — the rule base, not the inputs, drives the gain.</a:t>
+            </a:r>
+          </a:p>
+          <a:p>
+            <a:pPr lvl="0"/>
+            <a:r>
+              <a:rPr/>
+              <a:t>Held-out (isotonic calibration): </a:t>
             </a:r>
             <a:r>
               <a:rPr b="1"/>
-              <a:t>19.9</a:t>
+              <a:t>QWK 0.48, Pearson 0.61, RMSE 18.0</a:t>
             </a:r>
             <a:r>
               <a:rPr/>
@@ -4031,7 +4097,7 @@
             </a:r>
             <a:r>
               <a:rPr b="1"/>
-              <a:t>0.72 pts</a:t>
+              <a:t>0.24 pts</a:t>
             </a:r>
             <a:r>
               <a:rPr/>
@@ -4050,7 +4116,7 @@
             </a:r>
             <a:r>
               <a:rPr b="1"/>
-              <a:t>-1.1 pts</a:t>
+              <a:t>-0.5 pts</a:t>
             </a:r>
             <a:r>
               <a:rPr/>
@@ -4276,7 +4342,7 @@
                       </a:pPr>
                       <a:r>
                         <a:rPr/>
-                        <a:t>Sentence-BERT (offline)</a:t>
+                        <a:t>Cross-encoder + Sentence-BERT (offline)</a:t>
                       </a:r>
                     </a:p>
                   </a:txBody>
@@ -4309,6 +4375,38 @@
                       <a:r>
                         <a:rPr/>
                         <a:t>from-scratch Mamdani (NumPy)</a:t>
+                      </a:r>
+                    </a:p>
+                  </a:txBody>
+                </a:tc>
+              </a:tr>
+              <a:tr h="0">
+                <a:tc>
+                  <a:txBody>
+                    <a:bodyPr/>
+                    <a:lstStyle/>
+                    <a:p>
+                      <a:pPr lvl="0" indent="0" marL="0">
+                        <a:buNone/>
+                      </a:pPr>
+                      <a:r>
+                        <a:rPr/>
+                        <a:t>Calibration</a:t>
+                      </a:r>
+                    </a:p>
+                  </a:txBody>
+                </a:tc>
+                <a:tc>
+                  <a:txBody>
+                    <a:bodyPr/>
+                    <a:lstStyle/>
+                    <a:p>
+                      <a:pPr lvl="0" indent="0" marL="0">
+                        <a:buNone/>
+                      </a:pPr>
+                      <a:r>
+                        <a:rPr/>
+                        <a:t>isotonic (scikit-learn)</a:t>
                       </a:r>
                     </a:p>
                   </a:txBody>
@@ -5582,46 +5680,43 @@
           <a:p>
             <a:pPr lvl="0"/>
             <a:r>
-              <a:rPr/>
-              <a:t>Sentence-BERT (</a:t>
+              <a:rPr b="1"/>
+              <a:t>Cross-encoder</a:t>
+            </a:r>
+            <a:r>
+              <a:rPr/>
+              <a:t> (</a:t>
             </a:r>
             <a:r>
               <a:rPr>
                 <a:latin typeface="Courier"/>
               </a:rPr>
-              <a:t>all-MiniLM-L6-v2</a:t>
-            </a:r>
-            <a:r>
-              <a:rPr/>
-              <a:t>), runs locally — no API.</a:t>
-            </a:r>
-          </a:p>
-          <a:p>
-            <a:pPr lvl="0"/>
-            <a:r>
-              <a:rPr/>
-              <a:t>Encodes student and reference, cosine similarity.</a:t>
-            </a:r>
-          </a:p>
-          <a:p>
-            <a:pPr lvl="0"/>
-            <a:r>
-              <a:rPr/>
-              <a:t>Per-sentence coverage against the reference (0.75 threshold).</a:t>
-            </a:r>
-          </a:p>
-          <a:p>
-            <a:pPr lvl="0"/>
-            <a:r>
-              <a:rPr/>
-              <a:t>One deterministic number → nothing to hallucinate.</a:t>
-            </a:r>
-          </a:p>
-          <a:p>
-            <a:pPr lvl="0"/>
-            <a:r>
-              <a:rPr/>
-              <a:t>This is the only neural component: a semantic </a:t>
+              <a:t>stsb-roberta-base</a:t>
+            </a:r>
+            <a:r>
+              <a:rPr/>
+              <a:t>) scores the answer–reference pair directly — far better pairwise similarity than a bi-encoder.</a:t>
+            </a:r>
+          </a:p>
+          <a:p>
+            <a:pPr lvl="0"/>
+            <a:r>
+              <a:rPr/>
+              <a:t>Blended with Sentence-BERT per-sentence coverage (0.75 threshold).</a:t>
+            </a:r>
+          </a:p>
+          <a:p>
+            <a:pPr lvl="0"/>
+            <a:r>
+              <a:rPr/>
+              <a:t>Runs locally — no API, one deterministic number, nothing to hallucinate.</a:t>
+            </a:r>
+          </a:p>
+          <a:p>
+            <a:pPr lvl="0"/>
+            <a:r>
+              <a:rPr/>
+              <a:t>The only neural component: a semantic </a:t>
             </a:r>
             <a:r>
               <a:rPr b="1"/>
@@ -5629,7 +5724,7 @@
             </a:r>
             <a:r>
               <a:rPr/>
-              <a:t>.</a:t>
+              <a:t>, not the judge.</a:t>
             </a:r>
           </a:p>
         </p:txBody>
@@ -5699,14 +5794,29 @@
             <a:pPr lvl="0"/>
             <a:r>
               <a:rPr/>
-              <a:t>Inputs: keyword, similarity, NER scores (the 3 parent modules).</a:t>
-            </a:r>
-          </a:p>
-          <a:p>
-            <a:pPr lvl="0"/>
-            <a:r>
-              <a:rPr/>
-              <a:t>Output: final grade.</a:t>
+              <a:t>Inputs: </a:t>
+            </a:r>
+            <a:r>
+              <a:rPr b="1"/>
+              <a:t>keyword + similarity</a:t>
+            </a:r>
+            <a:r>
+              <a:rPr/>
+              <a:t> (the two informative signals).</a:t>
+            </a:r>
+          </a:p>
+          <a:p>
+            <a:pPr lvl="0"/>
+            <a:r>
+              <a:rPr/>
+              <a:t>NER dropped from the decision (near-random here, r=0.07) — still shown as evidence. Dropping a weak sensor needs no retraining.</a:t>
+            </a:r>
+          </a:p>
+          <a:p>
+            <a:pPr lvl="0"/>
+            <a:r>
+              <a:rPr/>
+              <a:t>Output grade: Poor / Average / Good / Very Good / Excellent.</a:t>
             </a:r>
           </a:p>
           <a:p>
@@ -5714,13 +5824,6 @@
             <a:r>
               <a:rPr/>
               <a:t>Triangular / trapezoidal membership functions: Low, Medium, High.</a:t>
-            </a:r>
-          </a:p>
-          <a:p>
-            <a:pPr lvl="0"/>
-            <a:r>
-              <a:rPr/>
-              <a:t>Each score gets a degree of membership in each set.</a:t>
             </a:r>
           </a:p>
         </p:txBody>
